--- a/dataset/guides_final/SEC/manual/IT-SEC-003-M_계정 도용·장비 분실 처리 매뉴얼.pptx
+++ b/dataset/guides_final/SEC/manual/IT-SEC-003-M_계정 도용·장비 분실 처리 매뉴얼.pptx
@@ -25051,9 +25051,9 @@
                 <a:tableStyleId>{5940675A-B579-460E-94D1-54222C63F5DA}</a:tableStyleId>
               </a:tblPr>
               <a:tblGrid>
-                <a:gridCol w="3909521"/>
-                <a:gridCol w="5104413"/>
-                <a:gridCol w="2009666"/>
+                <a:gridCol w="3847517"/>
+                <a:gridCol w="5023457"/>
+                <a:gridCol w="2152626"/>
               </a:tblGrid>
               <a:tr h="292100">
                 <a:tc>
@@ -26861,7 +26861,7 @@
                           <a:ea typeface="Malgun Gothic"/>
                           <a:cs typeface="Malgun Gothic"/>
                         </a:rPr>
-                        <a:t>INQ-2026-00386 (IP)</a:t>
+                        <a:t>INQ-2026-00386 (WIP)</a:t>
                       </a:r>
                     </a:p>
                   </a:txBody>
@@ -49234,7 +49234,7 @@
                 <a:ea typeface="Malgun Gothic"/>
                 <a:cs typeface="Malgun Gothic"/>
               </a:rPr>
-              <a:t>티켓: 해외 접속 사전 등록처럼 신청으로 처리하는 건. 정보보안팀에 배정하고 RDY → IP → FIN → CLS 으로 관리한다.</a:t>
+              <a:t>티켓: 해외 접속 사전 등록처럼 신청으로 처리하는 건. 정보보안팀에 배정하고 RDY → WIP → FIN → CLS 으로 관리한다.</a:t>
             </a:r>
           </a:p>
         </p:txBody>

--- a/dataset/guides_final/SEC/manual/IT-SEC-003-M_계정 도용·장비 분실 처리 매뉴얼.pptx
+++ b/dataset/guides_final/SEC/manual/IT-SEC-003-M_계정 도용·장비 분실 처리 매뉴얼.pptx
@@ -3247,7 +3247,7 @@
                 <a:ea typeface="Malgun Gothic"/>
                 <a:cs typeface="Malgun Gothic"/>
               </a:rPr>
-              <a:t>한화시스템 ICT IT 담당자 매뉴얼 · 정보보안</a:t>
+              <a:t>가상 ICT 기업 IT 담당자 매뉴얼 · 정보보안</a:t>
             </a:r>
           </a:p>
         </p:txBody>
@@ -3526,7 +3526,7 @@
                 <a:ea typeface="Malgun Gothic"/>
                 <a:cs typeface="Malgun Gothic"/>
               </a:rPr>
-              <a:t>© HANWHA SYSTEMS ICT · IT-SEC-003-M · 사내 제한</a:t>
+              <a:t>© 가상 ICT 기업 · IT-SEC-003-M · 사내 제한</a:t>
             </a:r>
           </a:p>
         </p:txBody>
@@ -5738,7 +5738,7 @@
                 <a:ea typeface="Malgun Gothic"/>
                 <a:cs typeface="Malgun Gothic"/>
               </a:rPr>
-              <a:t>© HANWHA SYSTEMS ICT · IT-SEC-003-M · 사내 제한</a:t>
+              <a:t>© 가상 ICT 기업 · IT-SEC-003-M · 사내 제한</a:t>
             </a:r>
           </a:p>
         </p:txBody>
@@ -6930,7 +6930,7 @@
                 <a:ea typeface="Malgun Gothic"/>
                 <a:cs typeface="Malgun Gothic"/>
               </a:rPr>
-              <a:t>© HANWHA SYSTEMS ICT · IT-SEC-003-M · 사내 제한</a:t>
+              <a:t>© 가상 ICT 기업 · IT-SEC-003-M · 사내 제한</a:t>
             </a:r>
           </a:p>
         </p:txBody>
@@ -7949,7 +7949,7 @@
                 <a:ea typeface="Malgun Gothic"/>
                 <a:cs typeface="Malgun Gothic"/>
               </a:rPr>
-              <a:t>© HANWHA SYSTEMS ICT · IT-SEC-003-M · 사내 제한</a:t>
+              <a:t>© 가상 ICT 기업 · IT-SEC-003-M · 사내 제한</a:t>
             </a:r>
           </a:p>
         </p:txBody>
@@ -10630,7 +10630,7 @@
                 <a:ea typeface="Malgun Gothic"/>
                 <a:cs typeface="Malgun Gothic"/>
               </a:rPr>
-              <a:t>© HANWHA SYSTEMS ICT · IT-SEC-003-M · 사내 제한</a:t>
+              <a:t>© 가상 ICT 기업 · IT-SEC-003-M · 사내 제한</a:t>
             </a:r>
           </a:p>
         </p:txBody>
@@ -12085,7 +12085,7 @@
                 <a:ea typeface="Malgun Gothic"/>
                 <a:cs typeface="Malgun Gothic"/>
               </a:rPr>
-              <a:t>© HANWHA SYSTEMS ICT · IT-SEC-003-M · 사내 제한</a:t>
+              <a:t>© 가상 ICT 기업 · IT-SEC-003-M · 사내 제한</a:t>
             </a:r>
           </a:p>
         </p:txBody>
@@ -14694,7 +14694,7 @@
                 <a:ea typeface="Malgun Gothic"/>
                 <a:cs typeface="Malgun Gothic"/>
               </a:rPr>
-              <a:t>© HANWHA SYSTEMS ICT · IT-SEC-003-M · 사내 제한</a:t>
+              <a:t>© 가상 ICT 기업 · IT-SEC-003-M · 사내 제한</a:t>
             </a:r>
           </a:p>
         </p:txBody>
@@ -15823,7 +15823,7 @@
                 <a:ea typeface="Malgun Gothic"/>
                 <a:cs typeface="Malgun Gothic"/>
               </a:rPr>
-              <a:t>© HANWHA SYSTEMS ICT · IT-SEC-003-M · 사내 제한</a:t>
+              <a:t>© 가상 ICT 기업 · IT-SEC-003-M · 사내 제한</a:t>
             </a:r>
           </a:p>
         </p:txBody>
@@ -18059,7 +18059,7 @@
                 <a:ea typeface="Malgun Gothic"/>
                 <a:cs typeface="Malgun Gothic"/>
               </a:rPr>
-              <a:t>© HANWHA SYSTEMS ICT · IT-SEC-003-M · 사내 제한</a:t>
+              <a:t>© 가상 ICT 기업 · IT-SEC-003-M · 사내 제한</a:t>
             </a:r>
           </a:p>
         </p:txBody>
@@ -19203,7 +19203,7 @@
                 <a:ea typeface="Malgun Gothic"/>
                 <a:cs typeface="Malgun Gothic"/>
               </a:rPr>
-              <a:t>© HANWHA SYSTEMS ICT · IT-SEC-003-M · 사내 제한</a:t>
+              <a:t>© 가상 ICT 기업 · IT-SEC-003-M · 사내 제한</a:t>
             </a:r>
           </a:p>
         </p:txBody>
@@ -20340,7 +20340,7 @@
                 <a:ea typeface="Malgun Gothic"/>
                 <a:cs typeface="Malgun Gothic"/>
               </a:rPr>
-              <a:t>© HANWHA SYSTEMS ICT · IT-SEC-003-M · 사내 제한</a:t>
+              <a:t>© 가상 ICT 기업 · IT-SEC-003-M · 사내 제한</a:t>
             </a:r>
           </a:p>
         </p:txBody>
@@ -21983,7 +21983,7 @@
                 <a:ea typeface="Malgun Gothic"/>
                 <a:cs typeface="Malgun Gothic"/>
               </a:rPr>
-              <a:t>© HANWHA SYSTEMS ICT · IT-SEC-003-M · 사내 제한</a:t>
+              <a:t>© 가상 ICT 기업 · IT-SEC-003-M · 사내 제한</a:t>
             </a:r>
           </a:p>
         </p:txBody>
@@ -24744,7 +24744,7 @@
                 <a:ea typeface="Malgun Gothic"/>
                 <a:cs typeface="Malgun Gothic"/>
               </a:rPr>
-              <a:t>© HANWHA SYSTEMS ICT · IT-SEC-003-M · 사내 제한</a:t>
+              <a:t>© 가상 ICT 기업 · IT-SEC-003-M · 사내 제한</a:t>
             </a:r>
           </a:p>
         </p:txBody>
@@ -26938,7 +26938,7 @@
                 <a:ea typeface="Malgun Gothic"/>
                 <a:cs typeface="Malgun Gothic"/>
               </a:rPr>
-              <a:t>© HANWHA SYSTEMS ICT · IT-SEC-003-M · 사내 제한</a:t>
+              <a:t>© 가상 ICT 기업 · IT-SEC-003-M · 사내 제한</a:t>
             </a:r>
           </a:p>
         </p:txBody>
@@ -27336,7 +27336,7 @@
                 <a:ea typeface="Malgun Gothic"/>
                 <a:cs typeface="Malgun Gothic"/>
               </a:rPr>
-              <a:t>© HANWHA SYSTEMS ICT · IT-SEC-003-M · 사내 제한</a:t>
+              <a:t>© 가상 ICT 기업 · IT-SEC-003-M · 사내 제한</a:t>
             </a:r>
           </a:p>
         </p:txBody>
@@ -29073,7 +29073,7 @@
                 <a:ea typeface="Malgun Gothic"/>
                 <a:cs typeface="Malgun Gothic"/>
               </a:rPr>
-              <a:t>© HANWHA SYSTEMS ICT · IT-SEC-003-M · 사내 제한</a:t>
+              <a:t>© 가상 ICT 기업 · IT-SEC-003-M · 사내 제한</a:t>
             </a:r>
           </a:p>
         </p:txBody>
@@ -31824,7 +31824,7 @@
                 <a:ea typeface="Malgun Gothic"/>
                 <a:cs typeface="Malgun Gothic"/>
               </a:rPr>
-              <a:t>© HANWHA SYSTEMS ICT · IT-SEC-003-M · 사내 제한</a:t>
+              <a:t>© 가상 ICT 기업 · IT-SEC-003-M · 사내 제한</a:t>
             </a:r>
           </a:p>
         </p:txBody>
@@ -33141,7 +33141,7 @@
                 <a:ea typeface="Malgun Gothic"/>
                 <a:cs typeface="Malgun Gothic"/>
               </a:rPr>
-              <a:t>© HANWHA SYSTEMS ICT · IT-SEC-003-M · 사내 제한</a:t>
+              <a:t>© 가상 ICT 기업 · IT-SEC-003-M · 사내 제한</a:t>
             </a:r>
           </a:p>
         </p:txBody>
@@ -36010,7 +36010,7 @@
                 <a:ea typeface="Malgun Gothic"/>
                 <a:cs typeface="Malgun Gothic"/>
               </a:rPr>
-              <a:t>© HANWHA SYSTEMS ICT · IT-SEC-003-M · 사내 제한</a:t>
+              <a:t>© 가상 ICT 기업 · IT-SEC-003-M · 사내 제한</a:t>
             </a:r>
           </a:p>
         </p:txBody>
@@ -37418,7 +37418,7 @@
                 <a:ea typeface="Malgun Gothic"/>
                 <a:cs typeface="Malgun Gothic"/>
               </a:rPr>
-              <a:t>© HANWHA SYSTEMS ICT · IT-SEC-003-M · 사내 제한</a:t>
+              <a:t>© 가상 ICT 기업 · IT-SEC-003-M · 사내 제한</a:t>
             </a:r>
           </a:p>
         </p:txBody>
@@ -37666,7 +37666,7 @@
                 <a:ea typeface="Malgun Gothic"/>
                 <a:cs typeface="Malgun Gothic"/>
               </a:rPr>
-              <a:t>© HANWHA SYSTEMS ICT · IT-SEC-003-M · 사내 제한</a:t>
+              <a:t>© 가상 ICT 기업 · IT-SEC-003-M · 사내 제한</a:t>
             </a:r>
           </a:p>
         </p:txBody>
@@ -38581,7 +38581,7 @@
                 <a:ea typeface="Malgun Gothic"/>
                 <a:cs typeface="Malgun Gothic"/>
               </a:rPr>
-              <a:t>© HANWHA SYSTEMS ICT · IT-SEC-003-M · 사내 제한</a:t>
+              <a:t>© 가상 ICT 기업 · IT-SEC-003-M · 사내 제한</a:t>
             </a:r>
           </a:p>
         </p:txBody>
@@ -39727,7 +39727,7 @@
                 <a:ea typeface="Malgun Gothic"/>
                 <a:cs typeface="Malgun Gothic"/>
               </a:rPr>
-              <a:t>© HANWHA SYSTEMS ICT · IT-SEC-003-M · 사내 제한</a:t>
+              <a:t>© 가상 ICT 기업 · IT-SEC-003-M · 사내 제한</a:t>
             </a:r>
           </a:p>
         </p:txBody>
@@ -39975,7 +39975,7 @@
                 <a:ea typeface="Malgun Gothic"/>
                 <a:cs typeface="Malgun Gothic"/>
               </a:rPr>
-              <a:t>© HANWHA SYSTEMS ICT · IT-SEC-003-M · 사내 제한</a:t>
+              <a:t>© 가상 ICT 기업 · IT-SEC-003-M · 사내 제한</a:t>
             </a:r>
           </a:p>
         </p:txBody>
@@ -41115,7 +41115,7 @@
                 <a:ea typeface="Malgun Gothic"/>
                 <a:cs typeface="Malgun Gothic"/>
               </a:rPr>
-              <a:t>© HANWHA SYSTEMS ICT · IT-SEC-003-M · 사내 제한</a:t>
+              <a:t>© 가상 ICT 기업 · IT-SEC-003-M · 사내 제한</a:t>
             </a:r>
           </a:p>
         </p:txBody>
@@ -41363,7 +41363,7 @@
                 <a:ea typeface="Malgun Gothic"/>
                 <a:cs typeface="Malgun Gothic"/>
               </a:rPr>
-              <a:t>© HANWHA SYSTEMS ICT · IT-SEC-003-M · 사내 제한</a:t>
+              <a:t>© 가상 ICT 기업 · IT-SEC-003-M · 사내 제한</a:t>
             </a:r>
           </a:p>
         </p:txBody>
@@ -43009,7 +43009,7 @@
                 <a:ea typeface="Malgun Gothic"/>
                 <a:cs typeface="Malgun Gothic"/>
               </a:rPr>
-              <a:t>© HANWHA SYSTEMS ICT · IT-SEC-003-M · 사내 제한</a:t>
+              <a:t>© 가상 ICT 기업 · IT-SEC-003-M · 사내 제한</a:t>
             </a:r>
           </a:p>
         </p:txBody>
@@ -43939,7 +43939,7 @@
                 <a:ea typeface="Malgun Gothic"/>
                 <a:cs typeface="Malgun Gothic"/>
               </a:rPr>
-              <a:t>© HANWHA SYSTEMS ICT · IT-SEC-003-M · 사내 제한</a:t>
+              <a:t>© 가상 ICT 기업 · IT-SEC-003-M · 사내 제한</a:t>
             </a:r>
           </a:p>
         </p:txBody>
@@ -44187,7 +44187,7 @@
                 <a:ea typeface="Malgun Gothic"/>
                 <a:cs typeface="Malgun Gothic"/>
               </a:rPr>
-              <a:t>© HANWHA SYSTEMS ICT · IT-SEC-003-M · 사내 제한</a:t>
+              <a:t>© 가상 ICT 기업 · IT-SEC-003-M · 사내 제한</a:t>
             </a:r>
           </a:p>
         </p:txBody>
@@ -45269,7 +45269,7 @@
                 <a:ea typeface="Malgun Gothic"/>
                 <a:cs typeface="Malgun Gothic"/>
               </a:rPr>
-              <a:t>© HANWHA SYSTEMS ICT · IT-SEC-003-M · 사내 제한</a:t>
+              <a:t>© 가상 ICT 기업 · IT-SEC-003-M · 사내 제한</a:t>
             </a:r>
           </a:p>
         </p:txBody>
@@ -45517,7 +45517,7 @@
                 <a:ea typeface="Malgun Gothic"/>
                 <a:cs typeface="Malgun Gothic"/>
               </a:rPr>
-              <a:t>© HANWHA SYSTEMS ICT · IT-SEC-003-M · 사내 제한</a:t>
+              <a:t>© 가상 ICT 기업 · IT-SEC-003-M · 사내 제한</a:t>
             </a:r>
           </a:p>
         </p:txBody>
@@ -49375,7 +49375,7 @@
                 <a:ea typeface="Malgun Gothic"/>
                 <a:cs typeface="Malgun Gothic"/>
               </a:rPr>
-              <a:t>© HANWHA SYSTEMS ICT · IT-SEC-003-M · 사내 제한</a:t>
+              <a:t>© 가상 ICT 기업 · IT-SEC-003-M · 사내 제한</a:t>
             </a:r>
           </a:p>
         </p:txBody>
@@ -50243,7 +50243,7 @@
                 <a:ea typeface="Malgun Gothic"/>
                 <a:cs typeface="Malgun Gothic"/>
               </a:rPr>
-              <a:t>© HANWHA SYSTEMS ICT · IT-SEC-003-M · 사내 제한</a:t>
+              <a:t>© 가상 ICT 기업 · IT-SEC-003-M · 사내 제한</a:t>
             </a:r>
           </a:p>
         </p:txBody>
@@ -50491,7 +50491,7 @@
                 <a:ea typeface="Malgun Gothic"/>
                 <a:cs typeface="Malgun Gothic"/>
               </a:rPr>
-              <a:t>© HANWHA SYSTEMS ICT · IT-SEC-003-M · 사내 제한</a:t>
+              <a:t>© 가상 ICT 기업 · IT-SEC-003-M · 사내 제한</a:t>
             </a:r>
           </a:p>
         </p:txBody>
